--- a/public/fun/cards/finance/finance-12.pptx
+++ b/public/fun/cards/finance/finance-12.pptx
@@ -3085,7 +3085,7 @@
     <p:bg>
       <p:bgPr>
         <a:solidFill>
-          <a:srgbClr val="FFFFFF"/>
+          <a:srgbClr val="E6FAF4"/>
         </a:solidFill>
         <a:effectLst/>
       </p:bgPr>
@@ -3099,14 +3099,594 @@
       <p:grpSpPr/>
       <p:sp>
         <p:nvSpPr>
-          <p:cNvPr id="2" name="텍스트"/>
+          <p:cNvPr id="2" name="Oval 1"/>
+          <p:cNvSpPr/>
+          <p:nvPr/>
+        </p:nvSpPr>
+        <p:spPr>
+          <a:xfrm>
+            <a:off x="2646000" y="234000"/>
+            <a:ext cx="36000" cy="36000"/>
+          </a:xfrm>
+          <a:prstGeom prst="ellipse">
+            <a:avLst/>
+          </a:prstGeom>
+          <a:solidFill>
+            <a:srgbClr val="00C896"/>
+          </a:solidFill>
+          <a:ln>
+            <a:noFill/>
+          </a:ln>
+        </p:spPr>
+        <p:txBody>
+          <a:bodyPr rtlCol="0" anchor="ctr"/>
+          <a:lstStyle/>
+          <a:p>
+            <a:pPr algn="ctr"/>
+          </a:p>
+        </p:txBody>
+      </p:sp>
+      <p:sp>
+        <p:nvSpPr>
+          <p:cNvPr id="3" name="Oval 2"/>
+          <p:cNvSpPr/>
+          <p:nvPr/>
+        </p:nvSpPr>
+        <p:spPr>
+          <a:xfrm>
+            <a:off x="2646000" y="334800"/>
+            <a:ext cx="36000" cy="36000"/>
+          </a:xfrm>
+          <a:prstGeom prst="ellipse">
+            <a:avLst/>
+          </a:prstGeom>
+          <a:solidFill>
+            <a:srgbClr val="C6F3E7"/>
+          </a:solidFill>
+          <a:ln>
+            <a:noFill/>
+          </a:ln>
+        </p:spPr>
+        <p:txBody>
+          <a:bodyPr rtlCol="0" anchor="ctr"/>
+          <a:lstStyle/>
+          <a:p>
+            <a:pPr algn="ctr"/>
+          </a:p>
+        </p:txBody>
+      </p:sp>
+      <p:sp>
+        <p:nvSpPr>
+          <p:cNvPr id="4" name="Oval 3"/>
+          <p:cNvSpPr/>
+          <p:nvPr/>
+        </p:nvSpPr>
+        <p:spPr>
+          <a:xfrm>
+            <a:off x="2646000" y="435600"/>
+            <a:ext cx="36000" cy="36000"/>
+          </a:xfrm>
+          <a:prstGeom prst="ellipse">
+            <a:avLst/>
+          </a:prstGeom>
+          <a:solidFill>
+            <a:srgbClr val="C6F3E7"/>
+          </a:solidFill>
+          <a:ln>
+            <a:noFill/>
+          </a:ln>
+        </p:spPr>
+        <p:txBody>
+          <a:bodyPr rtlCol="0" anchor="ctr"/>
+          <a:lstStyle/>
+          <a:p>
+            <a:pPr algn="ctr"/>
+          </a:p>
+        </p:txBody>
+      </p:sp>
+      <p:sp>
+        <p:nvSpPr>
+          <p:cNvPr id="5" name="Oval 4"/>
+          <p:cNvSpPr/>
+          <p:nvPr/>
+        </p:nvSpPr>
+        <p:spPr>
+          <a:xfrm>
+            <a:off x="2646000" y="536400"/>
+            <a:ext cx="36000" cy="36000"/>
+          </a:xfrm>
+          <a:prstGeom prst="ellipse">
+            <a:avLst/>
+          </a:prstGeom>
+          <a:solidFill>
+            <a:srgbClr val="00C896"/>
+          </a:solidFill>
+          <a:ln>
+            <a:noFill/>
+          </a:ln>
+        </p:spPr>
+        <p:txBody>
+          <a:bodyPr rtlCol="0" anchor="ctr"/>
+          <a:lstStyle/>
+          <a:p>
+            <a:pPr algn="ctr"/>
+          </a:p>
+        </p:txBody>
+      </p:sp>
+      <p:sp>
+        <p:nvSpPr>
+          <p:cNvPr id="6" name="Oval 5"/>
+          <p:cNvSpPr/>
+          <p:nvPr/>
+        </p:nvSpPr>
+        <p:spPr>
+          <a:xfrm>
+            <a:off x="2746800" y="234000"/>
+            <a:ext cx="36000" cy="36000"/>
+          </a:xfrm>
+          <a:prstGeom prst="ellipse">
+            <a:avLst/>
+          </a:prstGeom>
+          <a:solidFill>
+            <a:srgbClr val="C6F3E7"/>
+          </a:solidFill>
+          <a:ln>
+            <a:noFill/>
+          </a:ln>
+        </p:spPr>
+        <p:txBody>
+          <a:bodyPr rtlCol="0" anchor="ctr"/>
+          <a:lstStyle/>
+          <a:p>
+            <a:pPr algn="ctr"/>
+          </a:p>
+        </p:txBody>
+      </p:sp>
+      <p:sp>
+        <p:nvSpPr>
+          <p:cNvPr id="7" name="Oval 6"/>
+          <p:cNvSpPr/>
+          <p:nvPr/>
+        </p:nvSpPr>
+        <p:spPr>
+          <a:xfrm>
+            <a:off x="2746800" y="334800"/>
+            <a:ext cx="36000" cy="36000"/>
+          </a:xfrm>
+          <a:prstGeom prst="ellipse">
+            <a:avLst/>
+          </a:prstGeom>
+          <a:solidFill>
+            <a:srgbClr val="C6F3E7"/>
+          </a:solidFill>
+          <a:ln>
+            <a:noFill/>
+          </a:ln>
+        </p:spPr>
+        <p:txBody>
+          <a:bodyPr rtlCol="0" anchor="ctr"/>
+          <a:lstStyle/>
+          <a:p>
+            <a:pPr algn="ctr"/>
+          </a:p>
+        </p:txBody>
+      </p:sp>
+      <p:sp>
+        <p:nvSpPr>
+          <p:cNvPr id="8" name="Oval 7"/>
+          <p:cNvSpPr/>
+          <p:nvPr/>
+        </p:nvSpPr>
+        <p:spPr>
+          <a:xfrm>
+            <a:off x="2746800" y="435600"/>
+            <a:ext cx="36000" cy="36000"/>
+          </a:xfrm>
+          <a:prstGeom prst="ellipse">
+            <a:avLst/>
+          </a:prstGeom>
+          <a:solidFill>
+            <a:srgbClr val="00C896"/>
+          </a:solidFill>
+          <a:ln>
+            <a:noFill/>
+          </a:ln>
+        </p:spPr>
+        <p:txBody>
+          <a:bodyPr rtlCol="0" anchor="ctr"/>
+          <a:lstStyle/>
+          <a:p>
+            <a:pPr algn="ctr"/>
+          </a:p>
+        </p:txBody>
+      </p:sp>
+      <p:sp>
+        <p:nvSpPr>
+          <p:cNvPr id="9" name="Oval 8"/>
+          <p:cNvSpPr/>
+          <p:nvPr/>
+        </p:nvSpPr>
+        <p:spPr>
+          <a:xfrm>
+            <a:off x="2746800" y="536400"/>
+            <a:ext cx="36000" cy="36000"/>
+          </a:xfrm>
+          <a:prstGeom prst="ellipse">
+            <a:avLst/>
+          </a:prstGeom>
+          <a:solidFill>
+            <a:srgbClr val="C6F3E7"/>
+          </a:solidFill>
+          <a:ln>
+            <a:noFill/>
+          </a:ln>
+        </p:spPr>
+        <p:txBody>
+          <a:bodyPr rtlCol="0" anchor="ctr"/>
+          <a:lstStyle/>
+          <a:p>
+            <a:pPr algn="ctr"/>
+          </a:p>
+        </p:txBody>
+      </p:sp>
+      <p:sp>
+        <p:nvSpPr>
+          <p:cNvPr id="10" name="Oval 9"/>
+          <p:cNvSpPr/>
+          <p:nvPr/>
+        </p:nvSpPr>
+        <p:spPr>
+          <a:xfrm>
+            <a:off x="2847600" y="234000"/>
+            <a:ext cx="36000" cy="36000"/>
+          </a:xfrm>
+          <a:prstGeom prst="ellipse">
+            <a:avLst/>
+          </a:prstGeom>
+          <a:solidFill>
+            <a:srgbClr val="C6F3E7"/>
+          </a:solidFill>
+          <a:ln>
+            <a:noFill/>
+          </a:ln>
+        </p:spPr>
+        <p:txBody>
+          <a:bodyPr rtlCol="0" anchor="ctr"/>
+          <a:lstStyle/>
+          <a:p>
+            <a:pPr algn="ctr"/>
+          </a:p>
+        </p:txBody>
+      </p:sp>
+      <p:sp>
+        <p:nvSpPr>
+          <p:cNvPr id="11" name="Oval 10"/>
+          <p:cNvSpPr/>
+          <p:nvPr/>
+        </p:nvSpPr>
+        <p:spPr>
+          <a:xfrm>
+            <a:off x="2847600" y="334800"/>
+            <a:ext cx="36000" cy="36000"/>
+          </a:xfrm>
+          <a:prstGeom prst="ellipse">
+            <a:avLst/>
+          </a:prstGeom>
+          <a:solidFill>
+            <a:srgbClr val="00C896"/>
+          </a:solidFill>
+          <a:ln>
+            <a:noFill/>
+          </a:ln>
+        </p:spPr>
+        <p:txBody>
+          <a:bodyPr rtlCol="0" anchor="ctr"/>
+          <a:lstStyle/>
+          <a:p>
+            <a:pPr algn="ctr"/>
+          </a:p>
+        </p:txBody>
+      </p:sp>
+      <p:sp>
+        <p:nvSpPr>
+          <p:cNvPr id="12" name="Oval 11"/>
+          <p:cNvSpPr/>
+          <p:nvPr/>
+        </p:nvSpPr>
+        <p:spPr>
+          <a:xfrm>
+            <a:off x="2847600" y="435600"/>
+            <a:ext cx="36000" cy="36000"/>
+          </a:xfrm>
+          <a:prstGeom prst="ellipse">
+            <a:avLst/>
+          </a:prstGeom>
+          <a:solidFill>
+            <a:srgbClr val="C6F3E7"/>
+          </a:solidFill>
+          <a:ln>
+            <a:noFill/>
+          </a:ln>
+        </p:spPr>
+        <p:txBody>
+          <a:bodyPr rtlCol="0" anchor="ctr"/>
+          <a:lstStyle/>
+          <a:p>
+            <a:pPr algn="ctr"/>
+          </a:p>
+        </p:txBody>
+      </p:sp>
+      <p:sp>
+        <p:nvSpPr>
+          <p:cNvPr id="13" name="Oval 12"/>
+          <p:cNvSpPr/>
+          <p:nvPr/>
+        </p:nvSpPr>
+        <p:spPr>
+          <a:xfrm>
+            <a:off x="2847600" y="536400"/>
+            <a:ext cx="36000" cy="36000"/>
+          </a:xfrm>
+          <a:prstGeom prst="ellipse">
+            <a:avLst/>
+          </a:prstGeom>
+          <a:solidFill>
+            <a:srgbClr val="C6F3E7"/>
+          </a:solidFill>
+          <a:ln>
+            <a:noFill/>
+          </a:ln>
+        </p:spPr>
+        <p:txBody>
+          <a:bodyPr rtlCol="0" anchor="ctr"/>
+          <a:lstStyle/>
+          <a:p>
+            <a:pPr algn="ctr"/>
+          </a:p>
+        </p:txBody>
+      </p:sp>
+      <p:sp>
+        <p:nvSpPr>
+          <p:cNvPr id="14" name="Oval 13"/>
+          <p:cNvSpPr/>
+          <p:nvPr/>
+        </p:nvSpPr>
+        <p:spPr>
+          <a:xfrm>
+            <a:off x="2948400" y="234000"/>
+            <a:ext cx="36000" cy="36000"/>
+          </a:xfrm>
+          <a:prstGeom prst="ellipse">
+            <a:avLst/>
+          </a:prstGeom>
+          <a:solidFill>
+            <a:srgbClr val="00C896"/>
+          </a:solidFill>
+          <a:ln>
+            <a:noFill/>
+          </a:ln>
+        </p:spPr>
+        <p:txBody>
+          <a:bodyPr rtlCol="0" anchor="ctr"/>
+          <a:lstStyle/>
+          <a:p>
+            <a:pPr algn="ctr"/>
+          </a:p>
+        </p:txBody>
+      </p:sp>
+      <p:sp>
+        <p:nvSpPr>
+          <p:cNvPr id="15" name="Oval 14"/>
+          <p:cNvSpPr/>
+          <p:nvPr/>
+        </p:nvSpPr>
+        <p:spPr>
+          <a:xfrm>
+            <a:off x="2948400" y="334800"/>
+            <a:ext cx="36000" cy="36000"/>
+          </a:xfrm>
+          <a:prstGeom prst="ellipse">
+            <a:avLst/>
+          </a:prstGeom>
+          <a:solidFill>
+            <a:srgbClr val="C6F3E7"/>
+          </a:solidFill>
+          <a:ln>
+            <a:noFill/>
+          </a:ln>
+        </p:spPr>
+        <p:txBody>
+          <a:bodyPr rtlCol="0" anchor="ctr"/>
+          <a:lstStyle/>
+          <a:p>
+            <a:pPr algn="ctr"/>
+          </a:p>
+        </p:txBody>
+      </p:sp>
+      <p:sp>
+        <p:nvSpPr>
+          <p:cNvPr id="16" name="Oval 15"/>
+          <p:cNvSpPr/>
+          <p:nvPr/>
+        </p:nvSpPr>
+        <p:spPr>
+          <a:xfrm>
+            <a:off x="2948400" y="435600"/>
+            <a:ext cx="36000" cy="36000"/>
+          </a:xfrm>
+          <a:prstGeom prst="ellipse">
+            <a:avLst/>
+          </a:prstGeom>
+          <a:solidFill>
+            <a:srgbClr val="C6F3E7"/>
+          </a:solidFill>
+          <a:ln>
+            <a:noFill/>
+          </a:ln>
+        </p:spPr>
+        <p:txBody>
+          <a:bodyPr rtlCol="0" anchor="ctr"/>
+          <a:lstStyle/>
+          <a:p>
+            <a:pPr algn="ctr"/>
+          </a:p>
+        </p:txBody>
+      </p:sp>
+      <p:sp>
+        <p:nvSpPr>
+          <p:cNvPr id="17" name="Oval 16"/>
+          <p:cNvSpPr/>
+          <p:nvPr/>
+        </p:nvSpPr>
+        <p:spPr>
+          <a:xfrm>
+            <a:off x="2948400" y="536400"/>
+            <a:ext cx="36000" cy="36000"/>
+          </a:xfrm>
+          <a:prstGeom prst="ellipse">
+            <a:avLst/>
+          </a:prstGeom>
+          <a:solidFill>
+            <a:srgbClr val="00C896"/>
+          </a:solidFill>
+          <a:ln>
+            <a:noFill/>
+          </a:ln>
+        </p:spPr>
+        <p:txBody>
+          <a:bodyPr rtlCol="0" anchor="ctr"/>
+          <a:lstStyle/>
+          <a:p>
+            <a:pPr algn="ctr"/>
+          </a:p>
+        </p:txBody>
+      </p:sp>
+      <p:sp>
+        <p:nvSpPr>
+          <p:cNvPr id="18" name="Oval 17"/>
+          <p:cNvSpPr/>
+          <p:nvPr/>
+        </p:nvSpPr>
+        <p:spPr>
+          <a:xfrm>
+            <a:off x="3049200" y="234000"/>
+            <a:ext cx="36000" cy="36000"/>
+          </a:xfrm>
+          <a:prstGeom prst="ellipse">
+            <a:avLst/>
+          </a:prstGeom>
+          <a:solidFill>
+            <a:srgbClr val="C6F3E7"/>
+          </a:solidFill>
+          <a:ln>
+            <a:noFill/>
+          </a:ln>
+        </p:spPr>
+        <p:txBody>
+          <a:bodyPr rtlCol="0" anchor="ctr"/>
+          <a:lstStyle/>
+          <a:p>
+            <a:pPr algn="ctr"/>
+          </a:p>
+        </p:txBody>
+      </p:sp>
+      <p:sp>
+        <p:nvSpPr>
+          <p:cNvPr id="19" name="Oval 18"/>
+          <p:cNvSpPr/>
+          <p:nvPr/>
+        </p:nvSpPr>
+        <p:spPr>
+          <a:xfrm>
+            <a:off x="3049200" y="334800"/>
+            <a:ext cx="36000" cy="36000"/>
+          </a:xfrm>
+          <a:prstGeom prst="ellipse">
+            <a:avLst/>
+          </a:prstGeom>
+          <a:solidFill>
+            <a:srgbClr val="C6F3E7"/>
+          </a:solidFill>
+          <a:ln>
+            <a:noFill/>
+          </a:ln>
+        </p:spPr>
+        <p:txBody>
+          <a:bodyPr rtlCol="0" anchor="ctr"/>
+          <a:lstStyle/>
+          <a:p>
+            <a:pPr algn="ctr"/>
+          </a:p>
+        </p:txBody>
+      </p:sp>
+      <p:sp>
+        <p:nvSpPr>
+          <p:cNvPr id="20" name="Oval 19"/>
+          <p:cNvSpPr/>
+          <p:nvPr/>
+        </p:nvSpPr>
+        <p:spPr>
+          <a:xfrm>
+            <a:off x="3049200" y="435600"/>
+            <a:ext cx="36000" cy="36000"/>
+          </a:xfrm>
+          <a:prstGeom prst="ellipse">
+            <a:avLst/>
+          </a:prstGeom>
+          <a:solidFill>
+            <a:srgbClr val="00C896"/>
+          </a:solidFill>
+          <a:ln>
+            <a:noFill/>
+          </a:ln>
+        </p:spPr>
+        <p:txBody>
+          <a:bodyPr rtlCol="0" anchor="ctr"/>
+          <a:lstStyle/>
+          <a:p>
+            <a:pPr algn="ctr"/>
+          </a:p>
+        </p:txBody>
+      </p:sp>
+      <p:sp>
+        <p:nvSpPr>
+          <p:cNvPr id="21" name="Oval 20"/>
+          <p:cNvSpPr/>
+          <p:nvPr/>
+        </p:nvSpPr>
+        <p:spPr>
+          <a:xfrm>
+            <a:off x="3049200" y="536400"/>
+            <a:ext cx="36000" cy="36000"/>
+          </a:xfrm>
+          <a:prstGeom prst="ellipse">
+            <a:avLst/>
+          </a:prstGeom>
+          <a:solidFill>
+            <a:srgbClr val="C6F3E7"/>
+          </a:solidFill>
+          <a:ln>
+            <a:noFill/>
+          </a:ln>
+        </p:spPr>
+        <p:txBody>
+          <a:bodyPr rtlCol="0" anchor="ctr"/>
+          <a:lstStyle/>
+          <a:p>
+            <a:pPr algn="ctr"/>
+          </a:p>
+        </p:txBody>
+      </p:sp>
+      <p:sp>
+        <p:nvSpPr>
+          <p:cNvPr id="22" name="텍스트"/>
           <p:cNvSpPr txBox="1"/>
           <p:nvPr/>
         </p:nvSpPr>
         <p:spPr>
           <a:xfrm>
-            <a:off x="360000" y="201600"/>
-            <a:ext cx="2520000" cy="100800"/>
+            <a:off x="252000" y="223200"/>
+            <a:ext cx="1440000" cy="133351"/>
           </a:xfrm>
           <a:prstGeom prst="rect">
             <a:avLst/>
@@ -3119,15 +3699,15 @@
           </a:bodyPr>
           <a:lstStyle/>
           <a:p>
-            <a:pPr algn="ctr">
+            <a:pPr algn="l">
               <a:lnSpc>
                 <a:spcPts val="1015"/>
               </a:lnSpc>
             </a:pPr>
             <a:r>
-              <a:rPr sz="700" b="1" spc="300">
+              <a:rPr sz="700" b="1" spc="200">
                 <a:solidFill>
-                  <a:srgbClr val="936885"/>
+                  <a:srgbClr val="0B594A"/>
                 </a:solidFill>
                 <a:latin typeface="맑은 고딕"/>
                 <a:ea typeface="맑은 고딕"/>
@@ -3139,112 +3719,14 @@
       </p:sp>
       <p:sp>
         <p:nvSpPr>
-          <p:cNvPr id="3" name="Freeform 2"/>
-          <p:cNvSpPr/>
-          <p:nvPr/>
-        </p:nvSpPr>
-        <p:spPr>
-          <a:xfrm>
-            <a:off x="1546560" y="404640"/>
-            <a:ext cx="146880" cy="194400"/>
-          </a:xfrm>
-          <a:custGeom>
-            <a:avLst/>
-            <a:gdLst/>
-            <a:ahLst/>
-            <a:cxnLst/>
-            <a:rect l="l" t="t" r="r" b="b"/>
-            <a:pathLst>
-              <a:path w="146880" h="194400">
-                <a:moveTo>
-                  <a:pt x="0" y="21600"/>
-                </a:moveTo>
-                <a:lnTo>
-                  <a:pt x="73440" y="0"/>
-                </a:lnTo>
-                <a:lnTo>
-                  <a:pt x="146880" y="21600"/>
-                </a:lnTo>
-                <a:lnTo>
-                  <a:pt x="146880" y="103680"/>
-                </a:lnTo>
-                <a:lnTo>
-                  <a:pt x="73440" y="194400"/>
-                </a:lnTo>
-                <a:lnTo>
-                  <a:pt x="0" y="103680"/>
-                </a:lnTo>
-                <a:close/>
-              </a:path>
-            </a:pathLst>
-          </a:custGeom>
-          <a:solidFill>
-            <a:srgbClr val="BD4298"/>
-          </a:solidFill>
-          <a:ln>
-            <a:noFill/>
-          </a:ln>
-        </p:spPr>
-        <p:txBody>
-          <a:bodyPr rtlCol="0" anchor="ctr"/>
-          <a:lstStyle/>
-          <a:p>
-            <a:pPr algn="ctr"/>
-          </a:p>
-        </p:txBody>
-      </p:sp>
-      <p:cxnSp>
-        <p:nvCxnSpPr>
-          <p:cNvPr id="4" name="Connector 3"/>
-          <p:cNvCxnSpPr/>
-          <p:nvPr/>
-        </p:nvCxnSpPr>
-        <p:spPr>
-          <a:xfrm>
-            <a:off x="1589760" y="504000"/>
-            <a:ext cx="23760" cy="25920"/>
-          </a:xfrm>
-          <a:prstGeom prst="line">
-            <a:avLst/>
-          </a:prstGeom>
-          <a:ln w="15120">
-            <a:solidFill>
-              <a:srgbClr val="F1D0E7"/>
-            </a:solidFill>
-          </a:ln>
-        </p:spPr>
-      </p:cxnSp>
-      <p:cxnSp>
-        <p:nvCxnSpPr>
-          <p:cNvPr id="5" name="Connector 4"/>
-          <p:cNvCxnSpPr/>
-          <p:nvPr/>
-        </p:nvCxnSpPr>
-        <p:spPr>
-          <a:xfrm flipV="1">
-            <a:off x="1613520" y="478080"/>
-            <a:ext cx="41040" cy="51840"/>
-          </a:xfrm>
-          <a:prstGeom prst="line">
-            <a:avLst/>
-          </a:prstGeom>
-          <a:ln w="15120">
-            <a:solidFill>
-              <a:srgbClr val="F1D0E7"/>
-            </a:solidFill>
-          </a:ln>
-        </p:spPr>
-      </p:cxnSp>
-      <p:sp>
-        <p:nvSpPr>
-          <p:cNvPr id="6" name="텍스트"/>
+          <p:cNvPr id="23" name="텍스트"/>
           <p:cNvSpPr txBox="1"/>
           <p:nvPr/>
         </p:nvSpPr>
         <p:spPr>
           <a:xfrm>
-            <a:off x="360000" y="684000"/>
-            <a:ext cx="2520000" cy="313692"/>
+            <a:off x="252000" y="770400"/>
+            <a:ext cx="2016000" cy="360000"/>
           </a:xfrm>
           <a:prstGeom prst="rect">
             <a:avLst/>
@@ -3257,18 +3739,18 @@
           </a:bodyPr>
           <a:lstStyle/>
           <a:p>
-            <a:pPr algn="ctr">
+            <a:pPr algn="l">
               <a:lnSpc>
-                <a:spcPts val="2755"/>
+                <a:spcPts val="3190"/>
               </a:lnSpc>
             </a:pPr>
             <a:r>
-              <a:rPr sz="1900" b="1" spc="50">
+              <a:rPr sz="2200" b="1">
                 <a:solidFill>
-                  <a:srgbClr val="71285B"/>
+                  <a:srgbClr val="12151C"/>
                 </a:solidFill>
-                <a:latin typeface="바탕"/>
-                <a:ea typeface="바탕"/>
+                <a:latin typeface="맑은 고딕"/>
+                <a:ea typeface="맑은 고딕"/>
               </a:rPr>
               <a:t>오지호</a:t>
             </a:r>
@@ -3277,14 +3759,14 @@
       </p:sp>
       <p:sp>
         <p:nvSpPr>
-          <p:cNvPr id="7" name="텍스트"/>
+          <p:cNvPr id="24" name="텍스트"/>
           <p:cNvSpPr txBox="1"/>
           <p:nvPr/>
         </p:nvSpPr>
         <p:spPr>
           <a:xfrm>
-            <a:off x="360000" y="1051200"/>
-            <a:ext cx="2520000" cy="122400"/>
+            <a:off x="252000" y="1173600"/>
+            <a:ext cx="2016000" cy="171451"/>
           </a:xfrm>
           <a:prstGeom prst="rect">
             <a:avLst/>
@@ -3297,15 +3779,15 @@
           </a:bodyPr>
           <a:lstStyle/>
           <a:p>
-            <a:pPr algn="ctr">
+            <a:pPr algn="l">
               <a:lnSpc>
-                <a:spcPts val="1232"/>
+                <a:spcPts val="1305"/>
               </a:lnSpc>
             </a:pPr>
             <a:r>
-              <a:rPr sz="850" b="1">
+              <a:rPr sz="900" b="0">
                 <a:solidFill>
-                  <a:srgbClr val="BD4298"/>
+                  <a:srgbClr val="0B594A"/>
                 </a:solidFill>
                 <a:latin typeface="맑은 고딕"/>
                 <a:ea typeface="맑은 고딕"/>
@@ -3317,43 +3799,14 @@
       </p:sp>
       <p:sp>
         <p:nvSpPr>
-          <p:cNvPr id="8" name="Rectangle 7"/>
-          <p:cNvSpPr/>
-          <p:nvPr/>
-        </p:nvSpPr>
-        <p:spPr>
-          <a:xfrm>
-            <a:off x="1512000" y="1245600"/>
-            <a:ext cx="216000" cy="10800"/>
-          </a:xfrm>
-          <a:prstGeom prst="rect">
-            <a:avLst/>
-          </a:prstGeom>
-          <a:solidFill>
-            <a:srgbClr val="BD4298"/>
-          </a:solidFill>
-          <a:ln>
-            <a:noFill/>
-          </a:ln>
-        </p:spPr>
-        <p:txBody>
-          <a:bodyPr rtlCol="0" anchor="ctr"/>
-          <a:lstStyle/>
-          <a:p>
-            <a:pPr algn="ctr"/>
-          </a:p>
-        </p:txBody>
-      </p:sp>
-      <p:sp>
-        <p:nvSpPr>
-          <p:cNvPr id="9" name="텍스트"/>
+          <p:cNvPr id="25" name="텍스트"/>
           <p:cNvSpPr txBox="1"/>
           <p:nvPr/>
         </p:nvSpPr>
         <p:spPr>
           <a:xfrm>
-            <a:off x="360000" y="1339200"/>
-            <a:ext cx="2520000" cy="108000"/>
+            <a:off x="1620000" y="1339200"/>
+            <a:ext cx="1368000" cy="133351"/>
           </a:xfrm>
           <a:prstGeom prst="rect">
             <a:avLst/>
@@ -3366,7 +3819,7 @@
           </a:bodyPr>
           <a:lstStyle/>
           <a:p>
-            <a:pPr algn="ctr">
+            <a:pPr algn="r">
               <a:lnSpc>
                 <a:spcPts val="1015"/>
               </a:lnSpc>
@@ -3374,26 +3827,26 @@
             <a:r>
               <a:rPr sz="700" b="0">
                 <a:solidFill>
-                  <a:srgbClr val="71285B"/>
+                  <a:srgbClr val="12151C"/>
                 </a:solidFill>
                 <a:latin typeface="맑은 고딕"/>
                 <a:ea typeface="맑은 고딕"/>
               </a:rPr>
-              <a:t>010-1234-5678   ·   name@example.com</a:t>
-            </a:r>
-          </a:p>
-        </p:txBody>
-      </p:sp>
-      <p:sp>
-        <p:nvSpPr>
-          <p:cNvPr id="10" name="텍스트"/>
+              <a:t>010-1234-5678</a:t>
+            </a:r>
+          </a:p>
+        </p:txBody>
+      </p:sp>
+      <p:sp>
+        <p:nvSpPr>
+          <p:cNvPr id="26" name="텍스트"/>
           <p:cNvSpPr txBox="1"/>
           <p:nvPr/>
         </p:nvSpPr>
         <p:spPr>
           <a:xfrm>
-            <a:off x="360000" y="1468800"/>
-            <a:ext cx="2520000" cy="108000"/>
+            <a:off x="1620000" y="1476000"/>
+            <a:ext cx="1368000" cy="133351"/>
           </a:xfrm>
           <a:prstGeom prst="rect">
             <a:avLst/>
@@ -3406,7 +3859,7 @@
           </a:bodyPr>
           <a:lstStyle/>
           <a:p>
-            <a:pPr algn="ctr">
+            <a:pPr algn="r">
               <a:lnSpc>
                 <a:spcPts val="1015"/>
               </a:lnSpc>
@@ -3414,7 +3867,47 @@
             <a:r>
               <a:rPr sz="700" b="0">
                 <a:solidFill>
-                  <a:srgbClr val="936885"/>
+                  <a:srgbClr val="12151C"/>
+                </a:solidFill>
+                <a:latin typeface="맑은 고딕"/>
+                <a:ea typeface="맑은 고딕"/>
+              </a:rPr>
+              <a:t>name@example.com</a:t>
+            </a:r>
+          </a:p>
+        </p:txBody>
+      </p:sp>
+      <p:sp>
+        <p:nvSpPr>
+          <p:cNvPr id="27" name="텍스트"/>
+          <p:cNvSpPr txBox="1"/>
+          <p:nvPr/>
+        </p:nvSpPr>
+        <p:spPr>
+          <a:xfrm>
+            <a:off x="1620000" y="1612800"/>
+            <a:ext cx="1368000" cy="133351"/>
+          </a:xfrm>
+          <a:prstGeom prst="rect">
+            <a:avLst/>
+          </a:prstGeom>
+          <a:noFill/>
+        </p:spPr>
+        <p:txBody>
+          <a:bodyPr wrap="square" lIns="0" rIns="0" tIns="0" bIns="0" anchor="t">
+            <a:spAutoFit/>
+          </a:bodyPr>
+          <a:lstStyle/>
+          <a:p>
+            <a:pPr algn="r">
+              <a:lnSpc>
+                <a:spcPts val="1015"/>
+              </a:lnSpc>
+            </a:pPr>
+            <a:r>
+              <a:rPr sz="700" b="0">
+                <a:solidFill>
+                  <a:srgbClr val="12151C"/>
                 </a:solidFill>
                 <a:latin typeface="맑은 고딕"/>
                 <a:ea typeface="맑은 고딕"/>
@@ -3438,7 +3931,7 @@
     <p:bg>
       <p:bgPr>
         <a:solidFill>
-          <a:srgbClr val="FBF8F2"/>
+          <a:srgbClr val="F3F4F6"/>
         </a:solidFill>
         <a:effectLst/>
       </p:bgPr>
@@ -3452,284 +3945,14 @@
       <p:grpSpPr/>
       <p:sp>
         <p:nvSpPr>
-          <p:cNvPr id="2" name="Freeform 1"/>
-          <p:cNvSpPr/>
-          <p:nvPr/>
-        </p:nvSpPr>
-        <p:spPr>
-          <a:xfrm>
-            <a:off x="2016000" y="576000"/>
-            <a:ext cx="1224000" cy="1224000"/>
-          </a:xfrm>
-          <a:custGeom>
-            <a:avLst/>
-            <a:gdLst/>
-            <a:ahLst/>
-            <a:cxnLst/>
-            <a:rect l="l" t="t" r="r" b="b"/>
-            <a:pathLst>
-              <a:path w="1224000" h="1224000">
-                <a:moveTo>
-                  <a:pt x="1224000" y="1224000"/>
-                </a:moveTo>
-                <a:lnTo>
-                  <a:pt x="0" y="1224000"/>
-                </a:lnTo>
-                <a:lnTo>
-                  <a:pt x="7696" y="1086955"/>
-                </a:lnTo>
-                <a:lnTo>
-                  <a:pt x="30688" y="951634"/>
-                </a:lnTo>
-                <a:lnTo>
-                  <a:pt x="68687" y="819738"/>
-                </a:lnTo>
-                <a:lnTo>
-                  <a:pt x="121214" y="692926"/>
-                </a:lnTo>
-                <a:lnTo>
-                  <a:pt x="187610" y="572793"/>
-                </a:lnTo>
-                <a:lnTo>
-                  <a:pt x="267038" y="460848"/>
-                </a:lnTo>
-                <a:lnTo>
-                  <a:pt x="358501" y="358501"/>
-                </a:lnTo>
-                <a:lnTo>
-                  <a:pt x="460848" y="267038"/>
-                </a:lnTo>
-                <a:lnTo>
-                  <a:pt x="572793" y="187610"/>
-                </a:lnTo>
-                <a:lnTo>
-                  <a:pt x="692926" y="121214"/>
-                </a:lnTo>
-                <a:lnTo>
-                  <a:pt x="819738" y="68687"/>
-                </a:lnTo>
-                <a:lnTo>
-                  <a:pt x="951634" y="30688"/>
-                </a:lnTo>
-                <a:lnTo>
-                  <a:pt x="1086955" y="7696"/>
-                </a:lnTo>
-                <a:lnTo>
-                  <a:pt x="1224000" y="0"/>
-                </a:lnTo>
-                <a:close/>
-              </a:path>
-            </a:pathLst>
-          </a:custGeom>
-          <a:solidFill>
-            <a:srgbClr val="4C913B"/>
-          </a:solidFill>
-          <a:ln>
-            <a:noFill/>
-          </a:ln>
-        </p:spPr>
-        <p:txBody>
-          <a:bodyPr rtlCol="0" anchor="ctr"/>
-          <a:lstStyle/>
-          <a:p>
-            <a:pPr algn="ctr"/>
-          </a:p>
-        </p:txBody>
-      </p:sp>
-      <p:sp>
-        <p:nvSpPr>
-          <p:cNvPr id="3" name="Freeform 2"/>
-          <p:cNvSpPr/>
-          <p:nvPr/>
-        </p:nvSpPr>
-        <p:spPr>
-          <a:xfrm>
-            <a:off x="2520000" y="1080000"/>
-            <a:ext cx="720000" cy="720000"/>
-          </a:xfrm>
-          <a:custGeom>
-            <a:avLst/>
-            <a:gdLst/>
-            <a:ahLst/>
-            <a:cxnLst/>
-            <a:rect l="l" t="t" r="r" b="b"/>
-            <a:pathLst>
-              <a:path w="720000" h="720000">
-                <a:moveTo>
-                  <a:pt x="720000" y="720000"/>
-                </a:moveTo>
-                <a:lnTo>
-                  <a:pt x="0" y="720000"/>
-                </a:lnTo>
-                <a:lnTo>
-                  <a:pt x="4527" y="639386"/>
-                </a:lnTo>
-                <a:lnTo>
-                  <a:pt x="18052" y="559785"/>
-                </a:lnTo>
-                <a:lnTo>
-                  <a:pt x="40404" y="482199"/>
-                </a:lnTo>
-                <a:lnTo>
-                  <a:pt x="71302" y="407604"/>
-                </a:lnTo>
-                <a:lnTo>
-                  <a:pt x="110359" y="336937"/>
-                </a:lnTo>
-                <a:lnTo>
-                  <a:pt x="157081" y="271087"/>
-                </a:lnTo>
-                <a:lnTo>
-                  <a:pt x="210883" y="210883"/>
-                </a:lnTo>
-                <a:lnTo>
-                  <a:pt x="271087" y="157081"/>
-                </a:lnTo>
-                <a:lnTo>
-                  <a:pt x="336937" y="110359"/>
-                </a:lnTo>
-                <a:lnTo>
-                  <a:pt x="407604" y="71302"/>
-                </a:lnTo>
-                <a:lnTo>
-                  <a:pt x="482199" y="40404"/>
-                </a:lnTo>
-                <a:lnTo>
-                  <a:pt x="559785" y="18052"/>
-                </a:lnTo>
-                <a:lnTo>
-                  <a:pt x="639386" y="4527"/>
-                </a:lnTo>
-                <a:lnTo>
-                  <a:pt x="720000" y="0"/>
-                </a:lnTo>
-                <a:close/>
-              </a:path>
-            </a:pathLst>
-          </a:custGeom>
-          <a:solidFill>
-            <a:srgbClr val="CDE0C8"/>
-          </a:solidFill>
-          <a:ln>
-            <a:noFill/>
-          </a:ln>
-        </p:spPr>
-        <p:txBody>
-          <a:bodyPr rtlCol="0" anchor="ctr"/>
-          <a:lstStyle/>
-          <a:p>
-            <a:pPr algn="ctr"/>
-          </a:p>
-        </p:txBody>
-      </p:sp>
-      <p:sp>
-        <p:nvSpPr>
-          <p:cNvPr id="4" name="Freeform 3"/>
-          <p:cNvSpPr/>
-          <p:nvPr/>
-        </p:nvSpPr>
-        <p:spPr>
-          <a:xfrm>
-            <a:off x="2794320" y="1360080"/>
-            <a:ext cx="171360" cy="226800"/>
-          </a:xfrm>
-          <a:custGeom>
-            <a:avLst/>
-            <a:gdLst/>
-            <a:ahLst/>
-            <a:cxnLst/>
-            <a:rect l="l" t="t" r="r" b="b"/>
-            <a:pathLst>
-              <a:path w="171360" h="226800">
-                <a:moveTo>
-                  <a:pt x="0" y="25200"/>
-                </a:moveTo>
-                <a:lnTo>
-                  <a:pt x="85680" y="0"/>
-                </a:lnTo>
-                <a:lnTo>
-                  <a:pt x="171360" y="25200"/>
-                </a:lnTo>
-                <a:lnTo>
-                  <a:pt x="171360" y="120960"/>
-                </a:lnTo>
-                <a:lnTo>
-                  <a:pt x="85680" y="226800"/>
-                </a:lnTo>
-                <a:lnTo>
-                  <a:pt x="0" y="120960"/>
-                </a:lnTo>
-                <a:close/>
-              </a:path>
-            </a:pathLst>
-          </a:custGeom>
-          <a:solidFill>
-            <a:srgbClr val="FFFFFF"/>
-          </a:solidFill>
-          <a:ln>
-            <a:noFill/>
-          </a:ln>
-        </p:spPr>
-        <p:txBody>
-          <a:bodyPr rtlCol="0" anchor="ctr"/>
-          <a:lstStyle/>
-          <a:p>
-            <a:pPr algn="ctr"/>
-          </a:p>
-        </p:txBody>
-      </p:sp>
-      <p:cxnSp>
-        <p:nvCxnSpPr>
-          <p:cNvPr id="5" name="Connector 4"/>
-          <p:cNvCxnSpPr/>
-          <p:nvPr/>
-        </p:nvCxnSpPr>
-        <p:spPr>
-          <a:xfrm>
-            <a:off x="2844720" y="1476000"/>
-            <a:ext cx="27720" cy="30240"/>
-          </a:xfrm>
-          <a:prstGeom prst="line">
-            <a:avLst/>
-          </a:prstGeom>
-          <a:ln w="17640">
-            <a:solidFill>
-              <a:srgbClr val="737373"/>
-            </a:solidFill>
-          </a:ln>
-        </p:spPr>
-      </p:cxnSp>
-      <p:cxnSp>
-        <p:nvCxnSpPr>
-          <p:cNvPr id="6" name="Connector 5"/>
-          <p:cNvCxnSpPr/>
-          <p:nvPr/>
-        </p:nvCxnSpPr>
-        <p:spPr>
-          <a:xfrm flipV="1">
-            <a:off x="2872440" y="1445760"/>
-            <a:ext cx="47880" cy="60480"/>
-          </a:xfrm>
-          <a:prstGeom prst="line">
-            <a:avLst/>
-          </a:prstGeom>
-          <a:ln w="17640">
-            <a:solidFill>
-              <a:srgbClr val="737373"/>
-            </a:solidFill>
-          </a:ln>
-        </p:spPr>
-      </p:cxnSp>
-      <p:sp>
-        <p:nvSpPr>
-          <p:cNvPr id="7" name="텍스트"/>
+          <p:cNvPr id="2" name="텍스트"/>
           <p:cNvSpPr txBox="1"/>
           <p:nvPr/>
         </p:nvSpPr>
         <p:spPr>
           <a:xfrm>
             <a:off x="252000" y="324000"/>
-            <a:ext cx="1944000" cy="720000"/>
+            <a:ext cx="2520000" cy="792000"/>
           </a:xfrm>
           <a:prstGeom prst="rect">
             <a:avLst/>
@@ -3744,16 +3967,16 @@
           <a:p>
             <a:pPr algn="l">
               <a:lnSpc>
-                <a:spcPts val="1739"/>
+                <a:spcPts val="1884"/>
               </a:lnSpc>
             </a:pPr>
             <a:r>
-              <a:rPr sz="1200" b="1">
+              <a:rPr sz="1300" b="1">
                 <a:solidFill>
-                  <a:srgbClr val="71285B"/>
+                  <a:srgbClr val="12151C"/>
                 </a:solidFill>
-                <a:latin typeface="바탕"/>
-                <a:ea typeface="바탕"/>
+                <a:latin typeface="맑은 고딕"/>
+                <a:ea typeface="맑은 고딕"/>
               </a:rPr>
               <a:t>내 집 마련의 첫걸음을 함께</a:t>
             </a:r>
@@ -3762,14 +3985,43 @@
       </p:sp>
       <p:sp>
         <p:nvSpPr>
-          <p:cNvPr id="8" name="텍스트"/>
+          <p:cNvPr id="3" name="Rectangle 2"/>
+          <p:cNvSpPr/>
+          <p:nvPr/>
+        </p:nvSpPr>
+        <p:spPr>
+          <a:xfrm>
+            <a:off x="0" y="1476000"/>
+            <a:ext cx="3240000" cy="324000"/>
+          </a:xfrm>
+          <a:prstGeom prst="rect">
+            <a:avLst/>
+          </a:prstGeom>
+          <a:solidFill>
+            <a:srgbClr val="00C896"/>
+          </a:solidFill>
+          <a:ln>
+            <a:noFill/>
+          </a:ln>
+        </p:spPr>
+        <p:txBody>
+          <a:bodyPr rtlCol="0" anchor="ctr"/>
+          <a:lstStyle/>
+          <a:p>
+            <a:pPr algn="ctr"/>
+          </a:p>
+        </p:txBody>
+      </p:sp>
+      <p:sp>
+        <p:nvSpPr>
+          <p:cNvPr id="4" name="텍스트"/>
           <p:cNvSpPr txBox="1"/>
           <p:nvPr/>
         </p:nvSpPr>
         <p:spPr>
           <a:xfrm>
-            <a:off x="252000" y="1476000"/>
-            <a:ext cx="1440000" cy="108000"/>
+            <a:off x="252000" y="1569600"/>
+            <a:ext cx="1872000" cy="142876"/>
           </a:xfrm>
           <a:prstGeom prst="rect">
             <a:avLst/>
@@ -3790,13 +4042,104 @@
             <a:r>
               <a:rPr sz="750" b="1" spc="200">
                 <a:solidFill>
-                  <a:srgbClr val="89607A"/>
+                  <a:srgbClr val="12151C"/>
                 </a:solidFill>
                 <a:latin typeface="맑은 고딕"/>
                 <a:ea typeface="맑은 고딕"/>
               </a:rPr>
               <a:t>회사 · 사무소 이름</a:t>
             </a:r>
+          </a:p>
+        </p:txBody>
+      </p:sp>
+      <p:sp>
+        <p:nvSpPr>
+          <p:cNvPr id="5" name="Oval 4"/>
+          <p:cNvSpPr/>
+          <p:nvPr/>
+        </p:nvSpPr>
+        <p:spPr>
+          <a:xfrm>
+            <a:off x="2714400" y="1616400"/>
+            <a:ext cx="43200" cy="43200"/>
+          </a:xfrm>
+          <a:prstGeom prst="ellipse">
+            <a:avLst/>
+          </a:prstGeom>
+          <a:solidFill>
+            <a:srgbClr val="12151C"/>
+          </a:solidFill>
+          <a:ln>
+            <a:noFill/>
+          </a:ln>
+        </p:spPr>
+        <p:txBody>
+          <a:bodyPr rtlCol="0" anchor="ctr"/>
+          <a:lstStyle/>
+          <a:p>
+            <a:pPr algn="ctr"/>
+          </a:p>
+        </p:txBody>
+      </p:sp>
+      <p:sp>
+        <p:nvSpPr>
+          <p:cNvPr id="6" name="Oval 5"/>
+          <p:cNvSpPr/>
+          <p:nvPr/>
+        </p:nvSpPr>
+        <p:spPr>
+          <a:xfrm>
+            <a:off x="2822400" y="1616400"/>
+            <a:ext cx="43200" cy="43200"/>
+          </a:xfrm>
+          <a:prstGeom prst="ellipse">
+            <a:avLst/>
+          </a:prstGeom>
+          <a:solidFill>
+            <a:srgbClr val="12151C">
+              <a:alpha val="50000"/>
+            </a:srgbClr>
+          </a:solidFill>
+          <a:ln>
+            <a:noFill/>
+          </a:ln>
+        </p:spPr>
+        <p:txBody>
+          <a:bodyPr rtlCol="0" anchor="ctr"/>
+          <a:lstStyle/>
+          <a:p>
+            <a:pPr algn="ctr"/>
+          </a:p>
+        </p:txBody>
+      </p:sp>
+      <p:sp>
+        <p:nvSpPr>
+          <p:cNvPr id="7" name="Oval 6"/>
+          <p:cNvSpPr/>
+          <p:nvPr/>
+        </p:nvSpPr>
+        <p:spPr>
+          <a:xfrm>
+            <a:off x="2930400" y="1616400"/>
+            <a:ext cx="43200" cy="43200"/>
+          </a:xfrm>
+          <a:prstGeom prst="ellipse">
+            <a:avLst/>
+          </a:prstGeom>
+          <a:solidFill>
+            <a:srgbClr val="12151C">
+              <a:alpha val="50000"/>
+            </a:srgbClr>
+          </a:solidFill>
+          <a:ln>
+            <a:noFill/>
+          </a:ln>
+        </p:spPr>
+        <p:txBody>
+          <a:bodyPr rtlCol="0" anchor="ctr"/>
+          <a:lstStyle/>
+          <a:p>
+            <a:pPr algn="ctr"/>
           </a:p>
         </p:txBody>
       </p:sp>

--- a/public/fun/cards/finance/finance-12.pptx
+++ b/public/fun/cards/finance/finance-12.pptx
@@ -3099,16 +3099,45 @@
       <p:grpSpPr/>
       <p:sp>
         <p:nvSpPr>
-          <p:cNvPr id="2" name="Oval 1"/>
+          <p:cNvPr id="2" name="Rectangle 1"/>
           <p:cNvSpPr/>
           <p:nvPr/>
         </p:nvSpPr>
         <p:spPr>
           <a:xfrm>
-            <a:off x="2646000" y="234000"/>
-            <a:ext cx="36000" cy="36000"/>
-          </a:xfrm>
-          <a:prstGeom prst="ellipse">
+            <a:off x="0" y="1296000"/>
+            <a:ext cx="3240000" cy="504000"/>
+          </a:xfrm>
+          <a:prstGeom prst="rect">
+            <a:avLst/>
+          </a:prstGeom>
+          <a:solidFill>
+            <a:srgbClr val="C6F3E7"/>
+          </a:solidFill>
+          <a:ln>
+            <a:noFill/>
+          </a:ln>
+        </p:spPr>
+        <p:txBody>
+          <a:bodyPr rtlCol="0" anchor="ctr"/>
+          <a:lstStyle/>
+          <a:p>
+            <a:pPr algn="ctr"/>
+          </a:p>
+        </p:txBody>
+      </p:sp>
+      <p:sp>
+        <p:nvSpPr>
+          <p:cNvPr id="3" name="Rectangle 2"/>
+          <p:cNvSpPr/>
+          <p:nvPr/>
+        </p:nvSpPr>
+        <p:spPr>
+          <a:xfrm>
+            <a:off x="0" y="1296000"/>
+            <a:ext cx="3240000" cy="14400"/>
+          </a:xfrm>
+          <a:prstGeom prst="rect">
             <a:avLst/>
           </a:prstGeom>
           <a:solidFill>
@@ -3128,565 +3157,14 @@
       </p:sp>
       <p:sp>
         <p:nvSpPr>
-          <p:cNvPr id="3" name="Oval 2"/>
-          <p:cNvSpPr/>
-          <p:nvPr/>
-        </p:nvSpPr>
-        <p:spPr>
-          <a:xfrm>
-            <a:off x="2646000" y="334800"/>
-            <a:ext cx="36000" cy="36000"/>
-          </a:xfrm>
-          <a:prstGeom prst="ellipse">
-            <a:avLst/>
-          </a:prstGeom>
-          <a:solidFill>
-            <a:srgbClr val="C6F3E7"/>
-          </a:solidFill>
-          <a:ln>
-            <a:noFill/>
-          </a:ln>
-        </p:spPr>
-        <p:txBody>
-          <a:bodyPr rtlCol="0" anchor="ctr"/>
-          <a:lstStyle/>
-          <a:p>
-            <a:pPr algn="ctr"/>
-          </a:p>
-        </p:txBody>
-      </p:sp>
-      <p:sp>
-        <p:nvSpPr>
-          <p:cNvPr id="4" name="Oval 3"/>
-          <p:cNvSpPr/>
-          <p:nvPr/>
-        </p:nvSpPr>
-        <p:spPr>
-          <a:xfrm>
-            <a:off x="2646000" y="435600"/>
-            <a:ext cx="36000" cy="36000"/>
-          </a:xfrm>
-          <a:prstGeom prst="ellipse">
-            <a:avLst/>
-          </a:prstGeom>
-          <a:solidFill>
-            <a:srgbClr val="C6F3E7"/>
-          </a:solidFill>
-          <a:ln>
-            <a:noFill/>
-          </a:ln>
-        </p:spPr>
-        <p:txBody>
-          <a:bodyPr rtlCol="0" anchor="ctr"/>
-          <a:lstStyle/>
-          <a:p>
-            <a:pPr algn="ctr"/>
-          </a:p>
-        </p:txBody>
-      </p:sp>
-      <p:sp>
-        <p:nvSpPr>
-          <p:cNvPr id="5" name="Oval 4"/>
-          <p:cNvSpPr/>
-          <p:nvPr/>
-        </p:nvSpPr>
-        <p:spPr>
-          <a:xfrm>
-            <a:off x="2646000" y="536400"/>
-            <a:ext cx="36000" cy="36000"/>
-          </a:xfrm>
-          <a:prstGeom prst="ellipse">
-            <a:avLst/>
-          </a:prstGeom>
-          <a:solidFill>
-            <a:srgbClr val="00C896"/>
-          </a:solidFill>
-          <a:ln>
-            <a:noFill/>
-          </a:ln>
-        </p:spPr>
-        <p:txBody>
-          <a:bodyPr rtlCol="0" anchor="ctr"/>
-          <a:lstStyle/>
-          <a:p>
-            <a:pPr algn="ctr"/>
-          </a:p>
-        </p:txBody>
-      </p:sp>
-      <p:sp>
-        <p:nvSpPr>
-          <p:cNvPr id="6" name="Oval 5"/>
-          <p:cNvSpPr/>
-          <p:nvPr/>
-        </p:nvSpPr>
-        <p:spPr>
-          <a:xfrm>
-            <a:off x="2746800" y="234000"/>
-            <a:ext cx="36000" cy="36000"/>
-          </a:xfrm>
-          <a:prstGeom prst="ellipse">
-            <a:avLst/>
-          </a:prstGeom>
-          <a:solidFill>
-            <a:srgbClr val="C6F3E7"/>
-          </a:solidFill>
-          <a:ln>
-            <a:noFill/>
-          </a:ln>
-        </p:spPr>
-        <p:txBody>
-          <a:bodyPr rtlCol="0" anchor="ctr"/>
-          <a:lstStyle/>
-          <a:p>
-            <a:pPr algn="ctr"/>
-          </a:p>
-        </p:txBody>
-      </p:sp>
-      <p:sp>
-        <p:nvSpPr>
-          <p:cNvPr id="7" name="Oval 6"/>
-          <p:cNvSpPr/>
-          <p:nvPr/>
-        </p:nvSpPr>
-        <p:spPr>
-          <a:xfrm>
-            <a:off x="2746800" y="334800"/>
-            <a:ext cx="36000" cy="36000"/>
-          </a:xfrm>
-          <a:prstGeom prst="ellipse">
-            <a:avLst/>
-          </a:prstGeom>
-          <a:solidFill>
-            <a:srgbClr val="C6F3E7"/>
-          </a:solidFill>
-          <a:ln>
-            <a:noFill/>
-          </a:ln>
-        </p:spPr>
-        <p:txBody>
-          <a:bodyPr rtlCol="0" anchor="ctr"/>
-          <a:lstStyle/>
-          <a:p>
-            <a:pPr algn="ctr"/>
-          </a:p>
-        </p:txBody>
-      </p:sp>
-      <p:sp>
-        <p:nvSpPr>
-          <p:cNvPr id="8" name="Oval 7"/>
-          <p:cNvSpPr/>
-          <p:nvPr/>
-        </p:nvSpPr>
-        <p:spPr>
-          <a:xfrm>
-            <a:off x="2746800" y="435600"/>
-            <a:ext cx="36000" cy="36000"/>
-          </a:xfrm>
-          <a:prstGeom prst="ellipse">
-            <a:avLst/>
-          </a:prstGeom>
-          <a:solidFill>
-            <a:srgbClr val="00C896"/>
-          </a:solidFill>
-          <a:ln>
-            <a:noFill/>
-          </a:ln>
-        </p:spPr>
-        <p:txBody>
-          <a:bodyPr rtlCol="0" anchor="ctr"/>
-          <a:lstStyle/>
-          <a:p>
-            <a:pPr algn="ctr"/>
-          </a:p>
-        </p:txBody>
-      </p:sp>
-      <p:sp>
-        <p:nvSpPr>
-          <p:cNvPr id="9" name="Oval 8"/>
-          <p:cNvSpPr/>
-          <p:nvPr/>
-        </p:nvSpPr>
-        <p:spPr>
-          <a:xfrm>
-            <a:off x="2746800" y="536400"/>
-            <a:ext cx="36000" cy="36000"/>
-          </a:xfrm>
-          <a:prstGeom prst="ellipse">
-            <a:avLst/>
-          </a:prstGeom>
-          <a:solidFill>
-            <a:srgbClr val="C6F3E7"/>
-          </a:solidFill>
-          <a:ln>
-            <a:noFill/>
-          </a:ln>
-        </p:spPr>
-        <p:txBody>
-          <a:bodyPr rtlCol="0" anchor="ctr"/>
-          <a:lstStyle/>
-          <a:p>
-            <a:pPr algn="ctr"/>
-          </a:p>
-        </p:txBody>
-      </p:sp>
-      <p:sp>
-        <p:nvSpPr>
-          <p:cNvPr id="10" name="Oval 9"/>
-          <p:cNvSpPr/>
-          <p:nvPr/>
-        </p:nvSpPr>
-        <p:spPr>
-          <a:xfrm>
-            <a:off x="2847600" y="234000"/>
-            <a:ext cx="36000" cy="36000"/>
-          </a:xfrm>
-          <a:prstGeom prst="ellipse">
-            <a:avLst/>
-          </a:prstGeom>
-          <a:solidFill>
-            <a:srgbClr val="C6F3E7"/>
-          </a:solidFill>
-          <a:ln>
-            <a:noFill/>
-          </a:ln>
-        </p:spPr>
-        <p:txBody>
-          <a:bodyPr rtlCol="0" anchor="ctr"/>
-          <a:lstStyle/>
-          <a:p>
-            <a:pPr algn="ctr"/>
-          </a:p>
-        </p:txBody>
-      </p:sp>
-      <p:sp>
-        <p:nvSpPr>
-          <p:cNvPr id="11" name="Oval 10"/>
-          <p:cNvSpPr/>
-          <p:nvPr/>
-        </p:nvSpPr>
-        <p:spPr>
-          <a:xfrm>
-            <a:off x="2847600" y="334800"/>
-            <a:ext cx="36000" cy="36000"/>
-          </a:xfrm>
-          <a:prstGeom prst="ellipse">
-            <a:avLst/>
-          </a:prstGeom>
-          <a:solidFill>
-            <a:srgbClr val="00C896"/>
-          </a:solidFill>
-          <a:ln>
-            <a:noFill/>
-          </a:ln>
-        </p:spPr>
-        <p:txBody>
-          <a:bodyPr rtlCol="0" anchor="ctr"/>
-          <a:lstStyle/>
-          <a:p>
-            <a:pPr algn="ctr"/>
-          </a:p>
-        </p:txBody>
-      </p:sp>
-      <p:sp>
-        <p:nvSpPr>
-          <p:cNvPr id="12" name="Oval 11"/>
-          <p:cNvSpPr/>
-          <p:nvPr/>
-        </p:nvSpPr>
-        <p:spPr>
-          <a:xfrm>
-            <a:off x="2847600" y="435600"/>
-            <a:ext cx="36000" cy="36000"/>
-          </a:xfrm>
-          <a:prstGeom prst="ellipse">
-            <a:avLst/>
-          </a:prstGeom>
-          <a:solidFill>
-            <a:srgbClr val="C6F3E7"/>
-          </a:solidFill>
-          <a:ln>
-            <a:noFill/>
-          </a:ln>
-        </p:spPr>
-        <p:txBody>
-          <a:bodyPr rtlCol="0" anchor="ctr"/>
-          <a:lstStyle/>
-          <a:p>
-            <a:pPr algn="ctr"/>
-          </a:p>
-        </p:txBody>
-      </p:sp>
-      <p:sp>
-        <p:nvSpPr>
-          <p:cNvPr id="13" name="Oval 12"/>
-          <p:cNvSpPr/>
-          <p:nvPr/>
-        </p:nvSpPr>
-        <p:spPr>
-          <a:xfrm>
-            <a:off x="2847600" y="536400"/>
-            <a:ext cx="36000" cy="36000"/>
-          </a:xfrm>
-          <a:prstGeom prst="ellipse">
-            <a:avLst/>
-          </a:prstGeom>
-          <a:solidFill>
-            <a:srgbClr val="C6F3E7"/>
-          </a:solidFill>
-          <a:ln>
-            <a:noFill/>
-          </a:ln>
-        </p:spPr>
-        <p:txBody>
-          <a:bodyPr rtlCol="0" anchor="ctr"/>
-          <a:lstStyle/>
-          <a:p>
-            <a:pPr algn="ctr"/>
-          </a:p>
-        </p:txBody>
-      </p:sp>
-      <p:sp>
-        <p:nvSpPr>
-          <p:cNvPr id="14" name="Oval 13"/>
-          <p:cNvSpPr/>
-          <p:nvPr/>
-        </p:nvSpPr>
-        <p:spPr>
-          <a:xfrm>
-            <a:off x="2948400" y="234000"/>
-            <a:ext cx="36000" cy="36000"/>
-          </a:xfrm>
-          <a:prstGeom prst="ellipse">
-            <a:avLst/>
-          </a:prstGeom>
-          <a:solidFill>
-            <a:srgbClr val="00C896"/>
-          </a:solidFill>
-          <a:ln>
-            <a:noFill/>
-          </a:ln>
-        </p:spPr>
-        <p:txBody>
-          <a:bodyPr rtlCol="0" anchor="ctr"/>
-          <a:lstStyle/>
-          <a:p>
-            <a:pPr algn="ctr"/>
-          </a:p>
-        </p:txBody>
-      </p:sp>
-      <p:sp>
-        <p:nvSpPr>
-          <p:cNvPr id="15" name="Oval 14"/>
-          <p:cNvSpPr/>
-          <p:nvPr/>
-        </p:nvSpPr>
-        <p:spPr>
-          <a:xfrm>
-            <a:off x="2948400" y="334800"/>
-            <a:ext cx="36000" cy="36000"/>
-          </a:xfrm>
-          <a:prstGeom prst="ellipse">
-            <a:avLst/>
-          </a:prstGeom>
-          <a:solidFill>
-            <a:srgbClr val="C6F3E7"/>
-          </a:solidFill>
-          <a:ln>
-            <a:noFill/>
-          </a:ln>
-        </p:spPr>
-        <p:txBody>
-          <a:bodyPr rtlCol="0" anchor="ctr"/>
-          <a:lstStyle/>
-          <a:p>
-            <a:pPr algn="ctr"/>
-          </a:p>
-        </p:txBody>
-      </p:sp>
-      <p:sp>
-        <p:nvSpPr>
-          <p:cNvPr id="16" name="Oval 15"/>
-          <p:cNvSpPr/>
-          <p:nvPr/>
-        </p:nvSpPr>
-        <p:spPr>
-          <a:xfrm>
-            <a:off x="2948400" y="435600"/>
-            <a:ext cx="36000" cy="36000"/>
-          </a:xfrm>
-          <a:prstGeom prst="ellipse">
-            <a:avLst/>
-          </a:prstGeom>
-          <a:solidFill>
-            <a:srgbClr val="C6F3E7"/>
-          </a:solidFill>
-          <a:ln>
-            <a:noFill/>
-          </a:ln>
-        </p:spPr>
-        <p:txBody>
-          <a:bodyPr rtlCol="0" anchor="ctr"/>
-          <a:lstStyle/>
-          <a:p>
-            <a:pPr algn="ctr"/>
-          </a:p>
-        </p:txBody>
-      </p:sp>
-      <p:sp>
-        <p:nvSpPr>
-          <p:cNvPr id="17" name="Oval 16"/>
-          <p:cNvSpPr/>
-          <p:nvPr/>
-        </p:nvSpPr>
-        <p:spPr>
-          <a:xfrm>
-            <a:off x="2948400" y="536400"/>
-            <a:ext cx="36000" cy="36000"/>
-          </a:xfrm>
-          <a:prstGeom prst="ellipse">
-            <a:avLst/>
-          </a:prstGeom>
-          <a:solidFill>
-            <a:srgbClr val="00C896"/>
-          </a:solidFill>
-          <a:ln>
-            <a:noFill/>
-          </a:ln>
-        </p:spPr>
-        <p:txBody>
-          <a:bodyPr rtlCol="0" anchor="ctr"/>
-          <a:lstStyle/>
-          <a:p>
-            <a:pPr algn="ctr"/>
-          </a:p>
-        </p:txBody>
-      </p:sp>
-      <p:sp>
-        <p:nvSpPr>
-          <p:cNvPr id="18" name="Oval 17"/>
-          <p:cNvSpPr/>
-          <p:nvPr/>
-        </p:nvSpPr>
-        <p:spPr>
-          <a:xfrm>
-            <a:off x="3049200" y="234000"/>
-            <a:ext cx="36000" cy="36000"/>
-          </a:xfrm>
-          <a:prstGeom prst="ellipse">
-            <a:avLst/>
-          </a:prstGeom>
-          <a:solidFill>
-            <a:srgbClr val="C6F3E7"/>
-          </a:solidFill>
-          <a:ln>
-            <a:noFill/>
-          </a:ln>
-        </p:spPr>
-        <p:txBody>
-          <a:bodyPr rtlCol="0" anchor="ctr"/>
-          <a:lstStyle/>
-          <a:p>
-            <a:pPr algn="ctr"/>
-          </a:p>
-        </p:txBody>
-      </p:sp>
-      <p:sp>
-        <p:nvSpPr>
-          <p:cNvPr id="19" name="Oval 18"/>
-          <p:cNvSpPr/>
-          <p:nvPr/>
-        </p:nvSpPr>
-        <p:spPr>
-          <a:xfrm>
-            <a:off x="3049200" y="334800"/>
-            <a:ext cx="36000" cy="36000"/>
-          </a:xfrm>
-          <a:prstGeom prst="ellipse">
-            <a:avLst/>
-          </a:prstGeom>
-          <a:solidFill>
-            <a:srgbClr val="C6F3E7"/>
-          </a:solidFill>
-          <a:ln>
-            <a:noFill/>
-          </a:ln>
-        </p:spPr>
-        <p:txBody>
-          <a:bodyPr rtlCol="0" anchor="ctr"/>
-          <a:lstStyle/>
-          <a:p>
-            <a:pPr algn="ctr"/>
-          </a:p>
-        </p:txBody>
-      </p:sp>
-      <p:sp>
-        <p:nvSpPr>
-          <p:cNvPr id="20" name="Oval 19"/>
-          <p:cNvSpPr/>
-          <p:nvPr/>
-        </p:nvSpPr>
-        <p:spPr>
-          <a:xfrm>
-            <a:off x="3049200" y="435600"/>
-            <a:ext cx="36000" cy="36000"/>
-          </a:xfrm>
-          <a:prstGeom prst="ellipse">
-            <a:avLst/>
-          </a:prstGeom>
-          <a:solidFill>
-            <a:srgbClr val="00C896"/>
-          </a:solidFill>
-          <a:ln>
-            <a:noFill/>
-          </a:ln>
-        </p:spPr>
-        <p:txBody>
-          <a:bodyPr rtlCol="0" anchor="ctr"/>
-          <a:lstStyle/>
-          <a:p>
-            <a:pPr algn="ctr"/>
-          </a:p>
-        </p:txBody>
-      </p:sp>
-      <p:sp>
-        <p:nvSpPr>
-          <p:cNvPr id="21" name="Oval 20"/>
-          <p:cNvSpPr/>
-          <p:nvPr/>
-        </p:nvSpPr>
-        <p:spPr>
-          <a:xfrm>
-            <a:off x="3049200" y="536400"/>
-            <a:ext cx="36000" cy="36000"/>
-          </a:xfrm>
-          <a:prstGeom prst="ellipse">
-            <a:avLst/>
-          </a:prstGeom>
-          <a:solidFill>
-            <a:srgbClr val="C6F3E7"/>
-          </a:solidFill>
-          <a:ln>
-            <a:noFill/>
-          </a:ln>
-        </p:spPr>
-        <p:txBody>
-          <a:bodyPr rtlCol="0" anchor="ctr"/>
-          <a:lstStyle/>
-          <a:p>
-            <a:pPr algn="ctr"/>
-          </a:p>
-        </p:txBody>
-      </p:sp>
-      <p:sp>
-        <p:nvSpPr>
-          <p:cNvPr id="22" name="텍스트"/>
+          <p:cNvPr id="4" name="텍스트"/>
           <p:cNvSpPr txBox="1"/>
           <p:nvPr/>
         </p:nvSpPr>
         <p:spPr>
           <a:xfrm>
-            <a:off x="252000" y="223200"/>
-            <a:ext cx="1440000" cy="133351"/>
+            <a:off x="252000" y="252000"/>
+            <a:ext cx="1512000" cy="123826"/>
           </a:xfrm>
           <a:prstGeom prst="rect">
             <a:avLst/>
@@ -3701,11 +3179,11 @@
           <a:p>
             <a:pPr algn="l">
               <a:lnSpc>
-                <a:spcPts val="1015"/>
+                <a:spcPts val="942"/>
               </a:lnSpc>
             </a:pPr>
             <a:r>
-              <a:rPr sz="700" b="1" spc="200">
+              <a:rPr sz="650" b="1" spc="220">
                 <a:solidFill>
                   <a:srgbClr val="0B594A"/>
                 </a:solidFill>
@@ -3719,14 +3197,14 @@
       </p:sp>
       <p:sp>
         <p:nvSpPr>
-          <p:cNvPr id="23" name="텍스트"/>
+          <p:cNvPr id="5" name="텍스트"/>
           <p:cNvSpPr txBox="1"/>
           <p:nvPr/>
         </p:nvSpPr>
         <p:spPr>
           <a:xfrm>
-            <a:off x="252000" y="770400"/>
-            <a:ext cx="2016000" cy="360000"/>
+            <a:off x="252000" y="576000"/>
+            <a:ext cx="1800000" cy="237600"/>
           </a:xfrm>
           <a:prstGeom prst="rect">
             <a:avLst/>
@@ -3741,11 +3219,11 @@
           <a:p>
             <a:pPr algn="l">
               <a:lnSpc>
-                <a:spcPts val="3190"/>
+                <a:spcPts val="1957"/>
               </a:lnSpc>
             </a:pPr>
             <a:r>
-              <a:rPr sz="2200" b="1">
+              <a:rPr sz="1350" b="1" spc="120">
                 <a:solidFill>
                   <a:srgbClr val="12151C"/>
                 </a:solidFill>
@@ -3759,14 +3237,14 @@
       </p:sp>
       <p:sp>
         <p:nvSpPr>
-          <p:cNvPr id="24" name="텍스트"/>
+          <p:cNvPr id="6" name="텍스트"/>
           <p:cNvSpPr txBox="1"/>
           <p:nvPr/>
         </p:nvSpPr>
         <p:spPr>
           <a:xfrm>
-            <a:off x="252000" y="1173600"/>
-            <a:ext cx="2016000" cy="171451"/>
+            <a:off x="252000" y="828000"/>
+            <a:ext cx="1800000" cy="133351"/>
           </a:xfrm>
           <a:prstGeom prst="rect">
             <a:avLst/>
@@ -3781,11 +3259,11 @@
           <a:p>
             <a:pPr algn="l">
               <a:lnSpc>
-                <a:spcPts val="1305"/>
+                <a:spcPts val="1015"/>
               </a:lnSpc>
             </a:pPr>
             <a:r>
-              <a:rPr sz="900" b="0">
+              <a:rPr sz="700" b="0" spc="60">
                 <a:solidFill>
                   <a:srgbClr val="0B594A"/>
                 </a:solidFill>
@@ -3799,14 +3277,14 @@
       </p:sp>
       <p:sp>
         <p:nvSpPr>
-          <p:cNvPr id="25" name="텍스트"/>
+          <p:cNvPr id="7" name="텍스트"/>
           <p:cNvSpPr txBox="1"/>
           <p:nvPr/>
         </p:nvSpPr>
         <p:spPr>
           <a:xfrm>
-            <a:off x="1620000" y="1339200"/>
-            <a:ext cx="1368000" cy="133351"/>
+            <a:off x="252000" y="1411200"/>
+            <a:ext cx="900000" cy="91441"/>
           </a:xfrm>
           <a:prstGeom prst="rect">
             <a:avLst/>
@@ -3819,13 +3297,53 @@
           </a:bodyPr>
           <a:lstStyle/>
           <a:p>
-            <a:pPr algn="r">
+            <a:pPr algn="l">
               <a:lnSpc>
-                <a:spcPts val="1015"/>
+                <a:spcPts val="696"/>
               </a:lnSpc>
             </a:pPr>
             <a:r>
-              <a:rPr sz="700" b="0">
+              <a:rPr sz="480" b="1" spc="140">
+                <a:solidFill>
+                  <a:srgbClr val="0B594A"/>
+                </a:solidFill>
+                <a:latin typeface="맑은 고딕"/>
+                <a:ea typeface="맑은 고딕"/>
+              </a:rPr>
+              <a:t>TEL</a:t>
+            </a:r>
+          </a:p>
+        </p:txBody>
+      </p:sp>
+      <p:sp>
+        <p:nvSpPr>
+          <p:cNvPr id="8" name="텍스트"/>
+          <p:cNvSpPr txBox="1"/>
+          <p:nvPr/>
+        </p:nvSpPr>
+        <p:spPr>
+          <a:xfrm>
+            <a:off x="252000" y="1512000"/>
+            <a:ext cx="900000" cy="120016"/>
+          </a:xfrm>
+          <a:prstGeom prst="rect">
+            <a:avLst/>
+          </a:prstGeom>
+          <a:noFill/>
+        </p:spPr>
+        <p:txBody>
+          <a:bodyPr wrap="square" lIns="0" rIns="0" tIns="0" bIns="0" anchor="t">
+            <a:spAutoFit/>
+          </a:bodyPr>
+          <a:lstStyle/>
+          <a:p>
+            <a:pPr algn="l">
+              <a:lnSpc>
+                <a:spcPts val="913"/>
+              </a:lnSpc>
+            </a:pPr>
+            <a:r>
+              <a:rPr sz="630" b="0">
                 <a:solidFill>
                   <a:srgbClr val="12151C"/>
                 </a:solidFill>
@@ -3837,16 +3355,37 @@
           </a:p>
         </p:txBody>
       </p:sp>
-      <p:sp>
-        <p:nvSpPr>
-          <p:cNvPr id="26" name="텍스트"/>
+      <p:cxnSp>
+        <p:nvCxnSpPr>
+          <p:cNvPr id="9" name="Connector 8"/>
+          <p:cNvCxnSpPr/>
+          <p:nvPr/>
+        </p:nvCxnSpPr>
+        <p:spPr>
+          <a:xfrm>
+            <a:off x="1072800" y="1411200"/>
+            <a:ext cx="0" cy="201600"/>
+          </a:xfrm>
+          <a:prstGeom prst="line">
+            <a:avLst/>
+          </a:prstGeom>
+          <a:ln w="3600">
+            <a:solidFill>
+              <a:srgbClr val="B8F0E2"/>
+            </a:solidFill>
+          </a:ln>
+        </p:spPr>
+      </p:cxnSp>
+      <p:sp>
+        <p:nvSpPr>
+          <p:cNvPr id="10" name="텍스트"/>
           <p:cNvSpPr txBox="1"/>
           <p:nvPr/>
         </p:nvSpPr>
         <p:spPr>
           <a:xfrm>
-            <a:off x="1620000" y="1476000"/>
-            <a:ext cx="1368000" cy="133351"/>
+            <a:off x="1152000" y="1411200"/>
+            <a:ext cx="1008000" cy="91441"/>
           </a:xfrm>
           <a:prstGeom prst="rect">
             <a:avLst/>
@@ -3859,13 +3398,53 @@
           </a:bodyPr>
           <a:lstStyle/>
           <a:p>
-            <a:pPr algn="r">
+            <a:pPr algn="l">
               <a:lnSpc>
-                <a:spcPts val="1015"/>
+                <a:spcPts val="696"/>
               </a:lnSpc>
             </a:pPr>
             <a:r>
-              <a:rPr sz="700" b="0">
+              <a:rPr sz="480" b="1" spc="140">
+                <a:solidFill>
+                  <a:srgbClr val="0B594A"/>
+                </a:solidFill>
+                <a:latin typeface="맑은 고딕"/>
+                <a:ea typeface="맑은 고딕"/>
+              </a:rPr>
+              <a:t>MAIL</a:t>
+            </a:r>
+          </a:p>
+        </p:txBody>
+      </p:sp>
+      <p:sp>
+        <p:nvSpPr>
+          <p:cNvPr id="11" name="텍스트"/>
+          <p:cNvSpPr txBox="1"/>
+          <p:nvPr/>
+        </p:nvSpPr>
+        <p:spPr>
+          <a:xfrm>
+            <a:off x="1152000" y="1512000"/>
+            <a:ext cx="1008000" cy="120016"/>
+          </a:xfrm>
+          <a:prstGeom prst="rect">
+            <a:avLst/>
+          </a:prstGeom>
+          <a:noFill/>
+        </p:spPr>
+        <p:txBody>
+          <a:bodyPr wrap="square" lIns="0" rIns="0" tIns="0" bIns="0" anchor="t">
+            <a:spAutoFit/>
+          </a:bodyPr>
+          <a:lstStyle/>
+          <a:p>
+            <a:pPr algn="l">
+              <a:lnSpc>
+                <a:spcPts val="913"/>
+              </a:lnSpc>
+            </a:pPr>
+            <a:r>
+              <a:rPr sz="630" b="0">
                 <a:solidFill>
                   <a:srgbClr val="12151C"/>
                 </a:solidFill>
@@ -3877,16 +3456,37 @@
           </a:p>
         </p:txBody>
       </p:sp>
-      <p:sp>
-        <p:nvSpPr>
-          <p:cNvPr id="27" name="텍스트"/>
+      <p:cxnSp>
+        <p:nvCxnSpPr>
+          <p:cNvPr id="12" name="Connector 11"/>
+          <p:cNvCxnSpPr/>
+          <p:nvPr/>
+        </p:nvCxnSpPr>
+        <p:spPr>
+          <a:xfrm>
+            <a:off x="2080800" y="1411200"/>
+            <a:ext cx="0" cy="201600"/>
+          </a:xfrm>
+          <a:prstGeom prst="line">
+            <a:avLst/>
+          </a:prstGeom>
+          <a:ln w="3600">
+            <a:solidFill>
+              <a:srgbClr val="B8F0E2"/>
+            </a:solidFill>
+          </a:ln>
+        </p:spPr>
+      </p:cxnSp>
+      <p:sp>
+        <p:nvSpPr>
+          <p:cNvPr id="13" name="텍스트"/>
           <p:cNvSpPr txBox="1"/>
           <p:nvPr/>
         </p:nvSpPr>
         <p:spPr>
           <a:xfrm>
-            <a:off x="1620000" y="1612800"/>
-            <a:ext cx="1368000" cy="133351"/>
+            <a:off x="2160000" y="1411200"/>
+            <a:ext cx="972000" cy="91441"/>
           </a:xfrm>
           <a:prstGeom prst="rect">
             <a:avLst/>
@@ -3899,13 +3499,53 @@
           </a:bodyPr>
           <a:lstStyle/>
           <a:p>
-            <a:pPr algn="r">
+            <a:pPr algn="l">
               <a:lnSpc>
-                <a:spcPts val="1015"/>
+                <a:spcPts val="696"/>
               </a:lnSpc>
             </a:pPr>
             <a:r>
-              <a:rPr sz="700" b="0">
+              <a:rPr sz="480" b="1" spc="140">
+                <a:solidFill>
+                  <a:srgbClr val="0B594A"/>
+                </a:solidFill>
+                <a:latin typeface="맑은 고딕"/>
+                <a:ea typeface="맑은 고딕"/>
+              </a:rPr>
+              <a:t>ADDR</a:t>
+            </a:r>
+          </a:p>
+        </p:txBody>
+      </p:sp>
+      <p:sp>
+        <p:nvSpPr>
+          <p:cNvPr id="14" name="텍스트"/>
+          <p:cNvSpPr txBox="1"/>
+          <p:nvPr/>
+        </p:nvSpPr>
+        <p:spPr>
+          <a:xfrm>
+            <a:off x="2160000" y="1512000"/>
+            <a:ext cx="972000" cy="120016"/>
+          </a:xfrm>
+          <a:prstGeom prst="rect">
+            <a:avLst/>
+          </a:prstGeom>
+          <a:noFill/>
+        </p:spPr>
+        <p:txBody>
+          <a:bodyPr wrap="square" lIns="0" rIns="0" tIns="0" bIns="0" anchor="t">
+            <a:spAutoFit/>
+          </a:bodyPr>
+          <a:lstStyle/>
+          <a:p>
+            <a:pPr algn="l">
+              <a:lnSpc>
+                <a:spcPts val="913"/>
+              </a:lnSpc>
+            </a:pPr>
+            <a:r>
+              <a:rPr sz="630" b="0">
                 <a:solidFill>
                   <a:srgbClr val="12151C"/>
                 </a:solidFill>
@@ -3951,8 +3591,8 @@
         </p:nvSpPr>
         <p:spPr>
           <a:xfrm>
-            <a:off x="252000" y="324000"/>
-            <a:ext cx="2520000" cy="792000"/>
+            <a:off x="252000" y="252000"/>
+            <a:ext cx="1080000" cy="99061"/>
           </a:xfrm>
           <a:prstGeom prst="rect">
             <a:avLst/>
@@ -3967,18 +3607,18 @@
           <a:p>
             <a:pPr algn="l">
               <a:lnSpc>
-                <a:spcPts val="1884"/>
+                <a:spcPts val="754"/>
               </a:lnSpc>
             </a:pPr>
             <a:r>
-              <a:rPr sz="1300" b="1">
+              <a:rPr sz="520" b="1" spc="240">
                 <a:solidFill>
-                  <a:srgbClr val="12151C"/>
+                  <a:srgbClr val="6B7280"/>
                 </a:solidFill>
                 <a:latin typeface="맑은 고딕"/>
                 <a:ea typeface="맑은 고딕"/>
               </a:rPr>
-              <a:t>내 집 마련의 첫걸음을 함께</a:t>
+              <a:t>상담 분야</a:t>
             </a:r>
           </a:p>
         </p:txBody>
@@ -3991,8 +3631,8 @@
         </p:nvSpPr>
         <p:spPr>
           <a:xfrm>
-            <a:off x="0" y="1476000"/>
-            <a:ext cx="3240000" cy="324000"/>
+            <a:off x="252000" y="352800"/>
+            <a:ext cx="108000" cy="14400"/>
           </a:xfrm>
           <a:prstGeom prst="rect">
             <a:avLst/>
@@ -4012,16 +3652,37 @@
           </a:p>
         </p:txBody>
       </p:sp>
-      <p:sp>
-        <p:nvSpPr>
-          <p:cNvPr id="4" name="텍스트"/>
+      <p:cxnSp>
+        <p:nvCxnSpPr>
+          <p:cNvPr id="4" name="Connector 3"/>
+          <p:cNvCxnSpPr/>
+          <p:nvPr/>
+        </p:nvCxnSpPr>
+        <p:spPr>
+          <a:xfrm>
+            <a:off x="252000" y="468000"/>
+            <a:ext cx="1512000" cy="0"/>
+          </a:xfrm>
+          <a:prstGeom prst="line">
+            <a:avLst/>
+          </a:prstGeom>
+          <a:ln w="3600">
+            <a:solidFill>
+              <a:srgbClr val="DCDFE4"/>
+            </a:solidFill>
+          </a:ln>
+        </p:spPr>
+      </p:cxnSp>
+      <p:sp>
+        <p:nvSpPr>
+          <p:cNvPr id="5" name="텍스트"/>
           <p:cNvSpPr txBox="1"/>
           <p:nvPr/>
         </p:nvSpPr>
         <p:spPr>
           <a:xfrm>
-            <a:off x="252000" y="1569600"/>
-            <a:ext cx="1872000" cy="142876"/>
+            <a:off x="252000" y="511200"/>
+            <a:ext cx="1260000" cy="133351"/>
           </a:xfrm>
           <a:prstGeom prst="rect">
             <a:avLst/>
@@ -4036,41 +3697,185 @@
           <a:p>
             <a:pPr algn="l">
               <a:lnSpc>
-                <a:spcPts val="1087"/>
+                <a:spcPts val="1015"/>
               </a:lnSpc>
             </a:pPr>
             <a:r>
-              <a:rPr sz="750" b="1" spc="200">
+              <a:rPr sz="700" b="0">
                 <a:solidFill>
                   <a:srgbClr val="12151C"/>
                 </a:solidFill>
                 <a:latin typeface="맑은 고딕"/>
                 <a:ea typeface="맑은 고딕"/>
               </a:rPr>
-              <a:t>회사 · 사무소 이름</a:t>
-            </a:r>
-          </a:p>
-        </p:txBody>
-      </p:sp>
-      <p:sp>
-        <p:nvSpPr>
-          <p:cNvPr id="5" name="Oval 4"/>
+              <a:t>가입 점검</a:t>
+            </a:r>
+          </a:p>
+        </p:txBody>
+      </p:sp>
+      <p:cxnSp>
+        <p:nvCxnSpPr>
+          <p:cNvPr id="6" name="Connector 5"/>
+          <p:cNvCxnSpPr/>
+          <p:nvPr/>
+        </p:nvCxnSpPr>
+        <p:spPr>
+          <a:xfrm>
+            <a:off x="252000" y="655200"/>
+            <a:ext cx="1512000" cy="0"/>
+          </a:xfrm>
+          <a:prstGeom prst="line">
+            <a:avLst/>
+          </a:prstGeom>
+          <a:ln w="3600">
+            <a:solidFill>
+              <a:srgbClr val="DCDFE4"/>
+            </a:solidFill>
+          </a:ln>
+        </p:spPr>
+      </p:cxnSp>
+      <p:sp>
+        <p:nvSpPr>
+          <p:cNvPr id="7" name="텍스트"/>
+          <p:cNvSpPr txBox="1"/>
+          <p:nvPr/>
+        </p:nvSpPr>
+        <p:spPr>
+          <a:xfrm>
+            <a:off x="252000" y="698400"/>
+            <a:ext cx="1260000" cy="133351"/>
+          </a:xfrm>
+          <a:prstGeom prst="rect">
+            <a:avLst/>
+          </a:prstGeom>
+          <a:noFill/>
+        </p:spPr>
+        <p:txBody>
+          <a:bodyPr wrap="square" lIns="0" rIns="0" tIns="0" bIns="0" anchor="t">
+            <a:spAutoFit/>
+          </a:bodyPr>
+          <a:lstStyle/>
+          <a:p>
+            <a:pPr algn="l">
+              <a:lnSpc>
+                <a:spcPts val="1015"/>
+              </a:lnSpc>
+            </a:pPr>
+            <a:r>
+              <a:rPr sz="700" b="0">
+                <a:solidFill>
+                  <a:srgbClr val="12151C"/>
+                </a:solidFill>
+                <a:latin typeface="맑은 고딕"/>
+                <a:ea typeface="맑은 고딕"/>
+              </a:rPr>
+              <a:t>투자 상담</a:t>
+            </a:r>
+          </a:p>
+        </p:txBody>
+      </p:sp>
+      <p:cxnSp>
+        <p:nvCxnSpPr>
+          <p:cNvPr id="8" name="Connector 7"/>
+          <p:cNvCxnSpPr/>
+          <p:nvPr/>
+        </p:nvCxnSpPr>
+        <p:spPr>
+          <a:xfrm>
+            <a:off x="252000" y="842400"/>
+            <a:ext cx="1512000" cy="0"/>
+          </a:xfrm>
+          <a:prstGeom prst="line">
+            <a:avLst/>
+          </a:prstGeom>
+          <a:ln w="3600">
+            <a:solidFill>
+              <a:srgbClr val="DCDFE4"/>
+            </a:solidFill>
+          </a:ln>
+        </p:spPr>
+      </p:cxnSp>
+      <p:sp>
+        <p:nvSpPr>
+          <p:cNvPr id="9" name="텍스트"/>
+          <p:cNvSpPr txBox="1"/>
+          <p:nvPr/>
+        </p:nvSpPr>
+        <p:spPr>
+          <a:xfrm>
+            <a:off x="252000" y="885600"/>
+            <a:ext cx="1260000" cy="133351"/>
+          </a:xfrm>
+          <a:prstGeom prst="rect">
+            <a:avLst/>
+          </a:prstGeom>
+          <a:noFill/>
+        </p:spPr>
+        <p:txBody>
+          <a:bodyPr wrap="square" lIns="0" rIns="0" tIns="0" bIns="0" anchor="t">
+            <a:spAutoFit/>
+          </a:bodyPr>
+          <a:lstStyle/>
+          <a:p>
+            <a:pPr algn="l">
+              <a:lnSpc>
+                <a:spcPts val="1015"/>
+              </a:lnSpc>
+            </a:pPr>
+            <a:r>
+              <a:rPr sz="700" b="0">
+                <a:solidFill>
+                  <a:srgbClr val="12151C"/>
+                </a:solidFill>
+                <a:latin typeface="맑은 고딕"/>
+                <a:ea typeface="맑은 고딕"/>
+              </a:rPr>
+              <a:t>상속 · 증여</a:t>
+            </a:r>
+          </a:p>
+        </p:txBody>
+      </p:sp>
+      <p:cxnSp>
+        <p:nvCxnSpPr>
+          <p:cNvPr id="10" name="Connector 9"/>
+          <p:cNvCxnSpPr/>
+          <p:nvPr/>
+        </p:nvCxnSpPr>
+        <p:spPr>
+          <a:xfrm>
+            <a:off x="252000" y="1029600"/>
+            <a:ext cx="1512000" cy="0"/>
+          </a:xfrm>
+          <a:prstGeom prst="line">
+            <a:avLst/>
+          </a:prstGeom>
+          <a:ln w="3600">
+            <a:solidFill>
+              <a:srgbClr val="DCDFE4"/>
+            </a:solidFill>
+          </a:ln>
+        </p:spPr>
+      </p:cxnSp>
+      <p:sp>
+        <p:nvSpPr>
+          <p:cNvPr id="11" name="Rectangle 10"/>
           <p:cNvSpPr/>
           <p:nvPr/>
         </p:nvSpPr>
         <p:spPr>
           <a:xfrm>
-            <a:off x="2714400" y="1616400"/>
-            <a:ext cx="43200" cy="43200"/>
-          </a:xfrm>
-          <a:prstGeom prst="ellipse">
+            <a:off x="2196000" y="396000"/>
+            <a:ext cx="720000" cy="720000"/>
+          </a:xfrm>
+          <a:prstGeom prst="rect">
             <a:avLst/>
           </a:prstGeom>
-          <a:solidFill>
-            <a:srgbClr val="12151C"/>
-          </a:solidFill>
-          <a:ln>
-            <a:noFill/>
+          <a:noFill/>
+          <a:ln w="4320">
+            <a:solidFill>
+              <a:srgbClr val="6B7280"/>
+            </a:solidFill>
+            <a:prstDash val="dash"/>
           </a:ln>
         </p:spPr>
         <p:txBody>
@@ -4083,63 +3888,121 @@
       </p:sp>
       <p:sp>
         <p:nvSpPr>
-          <p:cNvPr id="6" name="Oval 5"/>
-          <p:cNvSpPr/>
+          <p:cNvPr id="12" name="텍스트"/>
+          <p:cNvSpPr txBox="1"/>
           <p:nvPr/>
         </p:nvSpPr>
         <p:spPr>
           <a:xfrm>
-            <a:off x="2822400" y="1616400"/>
-            <a:ext cx="43200" cy="43200"/>
-          </a:xfrm>
-          <a:prstGeom prst="ellipse">
+            <a:off x="2196000" y="396000"/>
+            <a:ext cx="720000" cy="720000"/>
+          </a:xfrm>
+          <a:prstGeom prst="rect">
             <a:avLst/>
           </a:prstGeom>
-          <a:solidFill>
-            <a:srgbClr val="12151C">
-              <a:alpha val="50000"/>
-            </a:srgbClr>
-          </a:solidFill>
-          <a:ln>
-            <a:noFill/>
-          </a:ln>
-        </p:spPr>
-        <p:txBody>
-          <a:bodyPr rtlCol="0" anchor="ctr"/>
-          <a:lstStyle/>
-          <a:p>
-            <a:pPr algn="ctr"/>
-          </a:p>
-        </p:txBody>
-      </p:sp>
-      <p:sp>
-        <p:nvSpPr>
-          <p:cNvPr id="7" name="Oval 6"/>
-          <p:cNvSpPr/>
+          <a:noFill/>
+        </p:spPr>
+        <p:txBody>
+          <a:bodyPr wrap="square" lIns="0" rIns="0" tIns="0" bIns="0" anchor="ctr">
+            <a:spAutoFit/>
+          </a:bodyPr>
+          <a:lstStyle/>
+          <a:p>
+            <a:pPr algn="ctr">
+              <a:lnSpc>
+                <a:spcPts val="1305"/>
+              </a:lnSpc>
+            </a:pPr>
+            <a:r>
+              <a:rPr sz="900" b="1">
+                <a:solidFill>
+                  <a:srgbClr val="6B7280"/>
+                </a:solidFill>
+                <a:latin typeface="맑은 고딕"/>
+                <a:ea typeface="맑은 고딕"/>
+              </a:rPr>
+              <a:t>QR</a:t>
+            </a:r>
+          </a:p>
+        </p:txBody>
+      </p:sp>
+      <p:sp>
+        <p:nvSpPr>
+          <p:cNvPr id="13" name="텍스트"/>
+          <p:cNvSpPr txBox="1"/>
           <p:nvPr/>
         </p:nvSpPr>
         <p:spPr>
           <a:xfrm>
-            <a:off x="2930400" y="1616400"/>
-            <a:ext cx="43200" cy="43200"/>
-          </a:xfrm>
-          <a:prstGeom prst="ellipse">
+            <a:off x="2196000" y="1209600"/>
+            <a:ext cx="720000" cy="118111"/>
+          </a:xfrm>
+          <a:prstGeom prst="rect">
             <a:avLst/>
           </a:prstGeom>
-          <a:solidFill>
-            <a:srgbClr val="12151C">
-              <a:alpha val="50000"/>
-            </a:srgbClr>
-          </a:solidFill>
-          <a:ln>
-            <a:noFill/>
-          </a:ln>
-        </p:spPr>
-        <p:txBody>
-          <a:bodyPr rtlCol="0" anchor="ctr"/>
-          <a:lstStyle/>
-          <a:p>
-            <a:pPr algn="ctr"/>
+          <a:noFill/>
+        </p:spPr>
+        <p:txBody>
+          <a:bodyPr wrap="square" lIns="0" rIns="0" tIns="0" bIns="0" anchor="t">
+            <a:spAutoFit/>
+          </a:bodyPr>
+          <a:lstStyle/>
+          <a:p>
+            <a:pPr algn="ctr">
+              <a:lnSpc>
+                <a:spcPts val="899"/>
+              </a:lnSpc>
+            </a:pPr>
+            <a:r>
+              <a:rPr sz="620" b="0">
+                <a:solidFill>
+                  <a:srgbClr val="12151C"/>
+                </a:solidFill>
+                <a:latin typeface="맑은 고딕"/>
+                <a:ea typeface="맑은 고딕"/>
+              </a:rPr>
+              <a:t>@아이디</a:t>
+            </a:r>
+          </a:p>
+        </p:txBody>
+      </p:sp>
+      <p:sp>
+        <p:nvSpPr>
+          <p:cNvPr id="14" name="텍스트"/>
+          <p:cNvSpPr txBox="1"/>
+          <p:nvPr/>
+        </p:nvSpPr>
+        <p:spPr>
+          <a:xfrm>
+            <a:off x="2196000" y="1353600"/>
+            <a:ext cx="720000" cy="118111"/>
+          </a:xfrm>
+          <a:prstGeom prst="rect">
+            <a:avLst/>
+          </a:prstGeom>
+          <a:noFill/>
+        </p:spPr>
+        <p:txBody>
+          <a:bodyPr wrap="square" lIns="0" rIns="0" tIns="0" bIns="0" anchor="t">
+            <a:spAutoFit/>
+          </a:bodyPr>
+          <a:lstStyle/>
+          <a:p>
+            <a:pPr algn="ctr">
+              <a:lnSpc>
+                <a:spcPts val="899"/>
+              </a:lnSpc>
+            </a:pPr>
+            <a:r>
+              <a:rPr sz="620" b="0">
+                <a:solidFill>
+                  <a:srgbClr val="6B7280"/>
+                </a:solidFill>
+                <a:latin typeface="맑은 고딕"/>
+                <a:ea typeface="맑은 고딕"/>
+              </a:rPr>
+              <a:t>평일 10:00 – 19:00</a:t>
+            </a:r>
           </a:p>
         </p:txBody>
       </p:sp>
